--- a/public/fun/pack/pptx/reviewpro/보장점검양식프리미엄_26_본인점검_버건디샴페인.pptx
+++ b/public/fun/pack/pptx/reviewpro/보장점검양식프리미엄_26_본인점검_버건디샴페인.pptx
@@ -112,12 +112,12 @@
   <p:extLst>
     <p:ext uri="{521415D9-36F7-43E2-AB2F-B90AF26B5E84}">
       <p14:sectionLst xmlns:p14="http://schemas.microsoft.com/office/powerpoint/2010/main">
-        <p14:section name="시작" id="{8DD4E532-14FB-400E-B9A4-F8542F105335}">
+        <p14:section name="시작" id="{B0EC7BCC-6F38-45EF-8019-0D35EBAC73CC}">
           <p14:sldIdLst>
             <p14:sldId id="256"/>
           </p14:sldIdLst>
         </p14:section>
-        <p14:section name="본문" id="{2A161895-1C72-4528-AD10-326F017CED69}">
+        <p14:section name="본문" id="{9FEE2574-12E6-4AA3-AA52-461B36CFE8EC}">
           <p14:sldIdLst>
             <p14:sldId id="257"/>
             <p14:sldId id="258"/>
@@ -1541,7 +1541,7 @@
             </a:lvl1pPr>
           </a:lstStyle>
           <a:p>
-            <a:fld id="{7FF5A174-1ED0-4222-9AF9-B7D460EE8D09}" type="slidenum">
+            <a:fld id="{BEFC0005-44F4-4EEA-BBEA-9E858244E51F}" type="slidenum">
               <a:rPr lang="en-US"/>
               <a:t>‹#›</a:t>
             </a:fld>
@@ -2273,7 +2273,7 @@
             </a:lvl1pPr>
           </a:lstStyle>
           <a:p>
-            <a:fld id="{99D988D3-7D35-43C3-9E7A-6EAD976044DA}" type="slidenum">
+            <a:fld id="{542B521A-FE60-4FEC-B14C-2E1344A11468}" type="slidenum">
               <a:rPr lang="en-US"/>
               <a:t>‹#›</a:t>
             </a:fld>
@@ -3026,7 +3026,7 @@
             </a:lvl1pPr>
           </a:lstStyle>
           <a:p>
-            <a:fld id="{94BCD2BA-8F50-4F9C-873C-88D2EB2D7FDB}" type="slidenum">
+            <a:fld id="{7DD1AD7E-5604-4F68-A145-166015F9A1C6}" type="slidenum">
               <a:rPr lang="en-US"/>
               <a:t>‹#›</a:t>
             </a:fld>
@@ -3981,7 +3981,7 @@
           <a:p>
             <a:r>
               <a:rPr lang="ko-KR"/>
-              <a:t>연말 전에 갱신일부터 확인합니다</a:t>
+              <a:t>갱신일부터 확인합니다</a:t>
             </a:r>
           </a:p>
         </p:txBody>
@@ -4003,7 +4003,7 @@
           <a:p>
             <a:r>
               <a:rPr lang="ko-KR"/>
-              <a:t>본인 점검 · 0000. 00. 00</a:t>
+              <a:t>본인 점검 · 날짜 입력</a:t>
             </a:r>
           </a:p>
           <a:p>
@@ -4094,7 +4094,7 @@
           <a:bodyPr/>
           <a:lstStyle/>
           <a:p>
-            <a:fld id="{323602E7-505E-4880-8FDF-178D38E2D500}" type="slidenum">
+            <a:fld id="{2DC91DC9-EBFE-4CE0-A4E4-DCC8A5F95B8C}" type="slidenum">
               <a:rPr lang="en-US"/>
               <a:t>‹#›</a:t>
             </a:fld>
@@ -4610,7 +4610,7 @@
           <a:bodyPr/>
           <a:lstStyle/>
           <a:p>
-            <a:fld id="{B2CFDEA3-9B9E-49D9-8C32-A2013D419B10}" type="slidenum">
+            <a:fld id="{FC63E161-0F85-4B96-BE3F-CDC97E6FDF78}" type="slidenum">
               <a:rPr lang="en-US"/>
               <a:t>‹#›</a:t>
             </a:fld>
@@ -6116,7 +6116,7 @@
           <a:bodyPr/>
           <a:lstStyle/>
           <a:p>
-            <a:fld id="{950414E6-9110-4E9E-AEFD-54A0CDE24352}" type="slidenum">
+            <a:fld id="{B09E873D-280A-4E2D-8162-C2642E952D46}" type="slidenum">
               <a:rPr lang="en-US"/>
               <a:t>‹#›</a:t>
             </a:fld>
@@ -7666,7 +7666,7 @@
           <a:bodyPr/>
           <a:lstStyle/>
           <a:p>
-            <a:fld id="{F7B37DDB-A3F5-43A7-A9DD-E634E4BC79FC}" type="slidenum">
+            <a:fld id="{03F102C1-1B7D-4D62-B345-4B75B60FA6E8}" type="slidenum">
               <a:rPr lang="en-US"/>
               <a:t>‹#›</a:t>
             </a:fld>
@@ -8666,7 +8666,7 @@
           <a:bodyPr/>
           <a:lstStyle/>
           <a:p>
-            <a:fld id="{60411AA9-3A81-4724-B97B-BA315257F8D6}" type="slidenum">
+            <a:fld id="{45B27E42-F5B6-4BED-866F-658C7D3BBF00}" type="slidenum">
               <a:rPr lang="en-US"/>
               <a:t>‹#›</a:t>
             </a:fld>
